--- a/media/Научная работа/Разработка системы позиционирования внутри помещения.pptx
+++ b/media/Научная работа/Разработка системы позиционирования внутри помещения.pptx
@@ -3994,6 +3994,36 @@
           </a:extLst>
         </p:spPr>
       </p:pic>
+      <p:pic>
+        <p:nvPicPr>
+          <p:cNvPr id="5" name="Рисунок 4">
+            <a:extLst>
+              <a:ext uri="{FF2B5EF4-FFF2-40B4-BE49-F238E27FC236}">
+                <a16:creationId xmlns:a16="http://schemas.microsoft.com/office/drawing/2014/main" id="{692ABC39-7126-4A90-BEC9-75FB4A8C2251}"/>
+              </a:ext>
+            </a:extLst>
+          </p:cNvPr>
+          <p:cNvPicPr>
+            <a:picLocks noChangeAspect="1"/>
+          </p:cNvPicPr>
+          <p:nvPr/>
+        </p:nvPicPr>
+        <p:blipFill>
+          <a:blip r:embed="rId5"/>
+          <a:stretch>
+            <a:fillRect/>
+          </a:stretch>
+        </p:blipFill>
+        <p:spPr>
+          <a:xfrm>
+            <a:off x="1127853" y="2101012"/>
+            <a:ext cx="1628395" cy="847171"/>
+          </a:xfrm>
+          <a:prstGeom prst="rect">
+            <a:avLst/>
+          </a:prstGeom>
+        </p:spPr>
+      </p:pic>
     </p:spTree>
     <p:extLst>
       <p:ext uri="{BB962C8B-B14F-4D97-AF65-F5344CB8AC3E}">
@@ -4494,6 +4524,36 @@
               </a14:hiddenFill>
             </a:ext>
           </a:extLst>
+        </p:spPr>
+      </p:pic>
+      <p:pic>
+        <p:nvPicPr>
+          <p:cNvPr id="8" name="Рисунок 7">
+            <a:extLst>
+              <a:ext uri="{FF2B5EF4-FFF2-40B4-BE49-F238E27FC236}">
+                <a16:creationId xmlns:a16="http://schemas.microsoft.com/office/drawing/2014/main" id="{391A86A5-77C6-44B1-91C0-EE6BF3F32621}"/>
+              </a:ext>
+            </a:extLst>
+          </p:cNvPr>
+          <p:cNvPicPr>
+            <a:picLocks noChangeAspect="1"/>
+          </p:cNvPicPr>
+          <p:nvPr/>
+        </p:nvPicPr>
+        <p:blipFill>
+          <a:blip r:embed="rId5"/>
+          <a:stretch>
+            <a:fillRect/>
+          </a:stretch>
+        </p:blipFill>
+        <p:spPr>
+          <a:xfrm>
+            <a:off x="9985109" y="5327009"/>
+            <a:ext cx="1641527" cy="854003"/>
+          </a:xfrm>
+          <a:prstGeom prst="rect">
+            <a:avLst/>
+          </a:prstGeom>
         </p:spPr>
       </p:pic>
     </p:spTree>

--- a/media/Научная работа/Разработка системы позиционирования внутри помещения.pptx
+++ b/media/Научная работа/Разработка системы позиционирования внутри помещения.pptx
@@ -4101,12 +4101,12 @@
         <p:spPr>
           <a:xfrm>
             <a:off x="838200" y="1825625"/>
-            <a:ext cx="5117983" cy="4351338"/>
+            <a:ext cx="5257800" cy="4351338"/>
           </a:xfrm>
         </p:spPr>
         <p:txBody>
           <a:bodyPr>
-            <a:normAutofit fontScale="92500" lnSpcReduction="10000"/>
+            <a:normAutofit fontScale="92500"/>
           </a:bodyPr>
           <a:lstStyle/>
           <a:p>
@@ -4115,7 +4115,15 @@
             </a:pPr>
             <a:r>
               <a:rPr lang="ru-RU" dirty="0"/>
-              <a:t>Система отслеживает устройство по Wi-Fi RSSI с помощью нескольких микроконтроллеров ESP32, каждый из которых получает сигнал и отправляет данные в центральный сервер в формате HTTPS/JSON. Сервер обрабатывает информацию и передает её веб-интерфейсу через </a:t>
+              <a:t>Система будет отслеживать устройство по Wi-Fi RSSI с помощью нескольких микроконтроллеров ESP32, каждый из которых будет получать сигнал и отправлять данные по HTTPS на центральный сервер в формате JSON. Сервер обработает информацию </a:t>
+            </a:r>
+            <a:r>
+              <a:rPr lang="ru-RU"/>
+              <a:t>и передаст </a:t>
+            </a:r>
+            <a:r>
+              <a:rPr lang="ru-RU" dirty="0"/>
+              <a:t>её веб-интерфейсу через </a:t>
             </a:r>
             <a:r>
               <a:rPr lang="ru-RU" dirty="0" err="1"/>

--- a/media/Научная работа/Разработка системы позиционирования внутри помещения.pptx
+++ b/media/Научная работа/Разработка системы позиционирования внутри помещения.pptx
@@ -6,12 +6,11 @@
   </p:sldMasterIdLst>
   <p:sldIdLst>
     <p:sldId id="256" r:id="rId2"/>
-    <p:sldId id="257" r:id="rId3"/>
-    <p:sldId id="258" r:id="rId4"/>
-    <p:sldId id="259" r:id="rId5"/>
-    <p:sldId id="260" r:id="rId6"/>
-    <p:sldId id="261" r:id="rId7"/>
-    <p:sldId id="262" r:id="rId8"/>
+    <p:sldId id="258" r:id="rId3"/>
+    <p:sldId id="259" r:id="rId4"/>
+    <p:sldId id="260" r:id="rId5"/>
+    <p:sldId id="261" r:id="rId6"/>
+    <p:sldId id="262" r:id="rId7"/>
   </p:sldIdLst>
   <p:sldSz cx="12192000" cy="6858000"/>
   <p:notesSz cx="6858000" cy="9144000"/>
@@ -3440,151 +3439,6 @@
           <p:cNvPr id="2" name="Заголовок 1">
             <a:extLst>
               <a:ext uri="{FF2B5EF4-FFF2-40B4-BE49-F238E27FC236}">
-                <a16:creationId xmlns:a16="http://schemas.microsoft.com/office/drawing/2014/main" id="{8DD713D1-1B97-49D1-A33A-E186B2CF9501}"/>
-              </a:ext>
-            </a:extLst>
-          </p:cNvPr>
-          <p:cNvSpPr>
-            <a:spLocks noGrp="1"/>
-          </p:cNvSpPr>
-          <p:nvPr>
-            <p:ph type="title"/>
-          </p:nvPr>
-        </p:nvSpPr>
-        <p:spPr>
-          <a:xfrm>
-            <a:off x="838200" y="365125"/>
-            <a:ext cx="10515600" cy="784167"/>
-          </a:xfrm>
-        </p:spPr>
-        <p:txBody>
-          <a:bodyPr/>
-          <a:lstStyle/>
-          <a:p>
-            <a:r>
-              <a:rPr lang="ru-RU" dirty="0"/>
-              <a:t>Аннотация</a:t>
-            </a:r>
-          </a:p>
-        </p:txBody>
-      </p:sp>
-      <p:sp>
-        <p:nvSpPr>
-          <p:cNvPr id="3" name="Объект 2">
-            <a:extLst>
-              <a:ext uri="{FF2B5EF4-FFF2-40B4-BE49-F238E27FC236}">
-                <a16:creationId xmlns:a16="http://schemas.microsoft.com/office/drawing/2014/main" id="{2EB7FE01-4360-43C9-A926-AA6AF6E2DA8A}"/>
-              </a:ext>
-            </a:extLst>
-          </p:cNvPr>
-          <p:cNvSpPr>
-            <a:spLocks noGrp="1"/>
-          </p:cNvSpPr>
-          <p:nvPr>
-            <p:ph idx="1"/>
-          </p:nvPr>
-        </p:nvSpPr>
-        <p:spPr>
-          <a:xfrm>
-            <a:off x="4865614" y="1317072"/>
-            <a:ext cx="6488185" cy="4859891"/>
-          </a:xfrm>
-        </p:spPr>
-        <p:txBody>
-          <a:bodyPr>
-            <a:normAutofit/>
-          </a:bodyPr>
-          <a:lstStyle/>
-          <a:p>
-            <a:pPr marL="0" indent="0">
-              <a:buNone/>
-            </a:pPr>
-            <a:r>
-              <a:rPr lang="ru-RU" dirty="0"/>
-              <a:t>Рассматривается проблема отсутствия эффективных систем навигации в за-крытых пространствах, где сигналы глобальных спутниковых систем (GPS, ГЛОНАСС) недоступны. Предлагается концепция системы позиционирования, основанной на использовании сети стационарных Wi-Fi-маяков (якорей) и алгоритмов </a:t>
-            </a:r>
-            <a:r>
-              <a:rPr lang="ru-RU" dirty="0" err="1"/>
-              <a:t>трилатерации</a:t>
-            </a:r>
-            <a:r>
-              <a:rPr lang="ru-RU" dirty="0"/>
-              <a:t> для определения местоположения мобильных объектов в реальном времени.</a:t>
-            </a:r>
-          </a:p>
-        </p:txBody>
-      </p:sp>
-      <p:pic>
-        <p:nvPicPr>
-          <p:cNvPr id="5" name="Рисунок 4">
-            <a:extLst>
-              <a:ext uri="{FF2B5EF4-FFF2-40B4-BE49-F238E27FC236}">
-                <a16:creationId xmlns:a16="http://schemas.microsoft.com/office/drawing/2014/main" id="{4C59DBE1-FD7B-47E8-A922-ACB37566137B}"/>
-              </a:ext>
-            </a:extLst>
-          </p:cNvPr>
-          <p:cNvPicPr>
-            <a:picLocks noChangeAspect="1"/>
-          </p:cNvPicPr>
-          <p:nvPr/>
-        </p:nvPicPr>
-        <p:blipFill>
-          <a:blip r:embed="rId2">
-            <a:extLst>
-              <a:ext uri="{28A0092B-C50C-407E-A947-70E740481C1C}">
-                <a14:useLocalDpi xmlns:a14="http://schemas.microsoft.com/office/drawing/2010/main" val="0"/>
-              </a:ext>
-            </a:extLst>
-          </a:blip>
-          <a:stretch>
-            <a:fillRect/>
-          </a:stretch>
-        </p:blipFill>
-        <p:spPr>
-          <a:xfrm>
-            <a:off x="444617" y="1593844"/>
-            <a:ext cx="4214767" cy="4214767"/>
-          </a:xfrm>
-          <a:prstGeom prst="rect">
-            <a:avLst/>
-          </a:prstGeom>
-        </p:spPr>
-      </p:pic>
-    </p:spTree>
-    <p:extLst>
-      <p:ext uri="{BB962C8B-B14F-4D97-AF65-F5344CB8AC3E}">
-        <p14:creationId xmlns:p14="http://schemas.microsoft.com/office/powerpoint/2010/main" val="3287426292"/>
-      </p:ext>
-    </p:extLst>
-  </p:cSld>
-  <p:clrMapOvr>
-    <a:masterClrMapping/>
-  </p:clrMapOvr>
-</p:sld>
-</file>
-
-<file path=ppt/slides/slide3.xml><?xml version="1.0" encoding="utf-8"?>
-<p:sld xmlns:a="http://schemas.openxmlformats.org/drawingml/2006/main" xmlns:r="http://schemas.openxmlformats.org/officeDocument/2006/relationships" xmlns:p="http://schemas.openxmlformats.org/presentationml/2006/main">
-  <p:cSld>
-    <p:spTree>
-      <p:nvGrpSpPr>
-        <p:cNvPr id="1" name=""/>
-        <p:cNvGrpSpPr/>
-        <p:nvPr/>
-      </p:nvGrpSpPr>
-      <p:grpSpPr>
-        <a:xfrm>
-          <a:off x="0" y="0"/>
-          <a:ext cx="0" cy="0"/>
-          <a:chOff x="0" y="0"/>
-          <a:chExt cx="0" cy="0"/>
-        </a:xfrm>
-      </p:grpSpPr>
-      <p:sp>
-        <p:nvSpPr>
-          <p:cNvPr id="2" name="Заголовок 1">
-            <a:extLst>
-              <a:ext uri="{FF2B5EF4-FFF2-40B4-BE49-F238E27FC236}">
                 <a16:creationId xmlns:a16="http://schemas.microsoft.com/office/drawing/2014/main" id="{7A1FB3EB-9805-4F36-AA50-83BC0ED24C1C}"/>
               </a:ext>
             </a:extLst>
@@ -3608,7 +3462,7 @@
           <a:p>
             <a:r>
               <a:rPr lang="ru-RU" dirty="0"/>
-              <a:t>Введение</a:t>
+              <a:t>Актуальность</a:t>
             </a:r>
           </a:p>
         </p:txBody>
@@ -3680,7 +3534,7 @@
         </p:blipFill>
         <p:spPr bwMode="auto">
           <a:xfrm>
-            <a:off x="8569354" y="2933351"/>
+            <a:off x="8208627" y="2924962"/>
             <a:ext cx="3740092" cy="3740092"/>
           </a:xfrm>
           <a:prstGeom prst="rect">
@@ -3758,7 +3612,7 @@
 </p:sld>
 </file>
 
-<file path=ppt/slides/slide4.xml><?xml version="1.0" encoding="utf-8"?>
+<file path=ppt/slides/slide3.xml><?xml version="1.0" encoding="utf-8"?>
 <p:sld xmlns:a="http://schemas.openxmlformats.org/drawingml/2006/main" xmlns:r="http://schemas.openxmlformats.org/officeDocument/2006/relationships" xmlns:p="http://schemas.openxmlformats.org/presentationml/2006/main">
   <p:cSld>
     <p:spTree>
@@ -4037,7 +3891,7 @@
 </p:sld>
 </file>
 
-<file path=ppt/slides/slide5.xml><?xml version="1.0" encoding="utf-8"?>
+<file path=ppt/slides/slide4.xml><?xml version="1.0" encoding="utf-8"?>
 <p:sld xmlns:a="http://schemas.openxmlformats.org/drawingml/2006/main" xmlns:r="http://schemas.openxmlformats.org/officeDocument/2006/relationships" xmlns:p="http://schemas.openxmlformats.org/presentationml/2006/main">
   <p:cSld>
     <p:spTree>
@@ -4188,7 +4042,7 @@
 </p:sld>
 </file>
 
-<file path=ppt/slides/slide6.xml><?xml version="1.0" encoding="utf-8"?>
+<file path=ppt/slides/slide5.xml><?xml version="1.0" encoding="utf-8"?>
 <p:sld xmlns:a="http://schemas.openxmlformats.org/drawingml/2006/main" xmlns:r="http://schemas.openxmlformats.org/officeDocument/2006/relationships" xmlns:p="http://schemas.openxmlformats.org/presentationml/2006/main">
   <p:cSld>
     <p:spTree>
@@ -4322,7 +4176,7 @@
 </p:sld>
 </file>
 
-<file path=ppt/slides/slide7.xml><?xml version="1.0" encoding="utf-8"?>
+<file path=ppt/slides/slide6.xml><?xml version="1.0" encoding="utf-8"?>
 <p:sld xmlns:a="http://schemas.openxmlformats.org/drawingml/2006/main" xmlns:r="http://schemas.openxmlformats.org/officeDocument/2006/relationships" xmlns:p="http://schemas.openxmlformats.org/presentationml/2006/main">
   <p:cSld>
     <p:spTree>
